--- a/dataset/guides_final/SYS/guide/IT-SYS-008_개발 서버·DB 장애 대응 가이드.pptx
+++ b/dataset/guides_final/SYS/guide/IT-SYS-008_개발 서버·DB 장애 대응 가이드.pptx
@@ -3243,7 +3243,7 @@
                 <a:ea typeface="Malgun Gothic"/>
                 <a:cs typeface="Malgun Gothic"/>
               </a:rPr>
-              <a:t>한화시스템 ICT 임직원 IT 안내 · 사내 시스템</a:t>
+              <a:t>가상 ICT 기업 임직원 IT 안내 · 사내 시스템</a:t>
             </a:r>
           </a:p>
         </p:txBody>
@@ -3475,7 +3475,7 @@
                 <a:ea typeface="Malgun Gothic"/>
                 <a:cs typeface="Malgun Gothic"/>
               </a:rPr>
-              <a:t>© HANWHA SYSTEMS ICT · IT-SYS-008 · 사내 일반</a:t>
+              <a:t>© 가상 ICT 기업 · IT-SYS-008 · 사내 일반</a:t>
             </a:r>
           </a:p>
         </p:txBody>
@@ -6137,7 +6137,7 @@
                 <a:ea typeface="Malgun Gothic"/>
                 <a:cs typeface="Malgun Gothic"/>
               </a:rPr>
-              <a:t>© HANWHA SYSTEMS ICT · IT-SYS-008 · 사내 일반</a:t>
+              <a:t>© 가상 ICT 기업 · IT-SYS-008 · 사내 일반</a:t>
             </a:r>
           </a:p>
         </p:txBody>
@@ -6747,7 +6747,7 @@
                 <a:ea typeface="Malgun Gothic"/>
                 <a:cs typeface="Malgun Gothic"/>
               </a:rPr>
-              <a:t>© HANWHA SYSTEMS ICT · IT-SYS-008 · 사내 일반</a:t>
+              <a:t>© 가상 ICT 기업 · IT-SYS-008 · 사내 일반</a:t>
             </a:r>
           </a:p>
         </p:txBody>
@@ -7404,7 +7404,7 @@
                 <a:ea typeface="Malgun Gothic"/>
                 <a:cs typeface="Malgun Gothic"/>
               </a:rPr>
-              <a:t>© HANWHA SYSTEMS ICT · IT-SYS-008 · 사내 일반</a:t>
+              <a:t>© 가상 ICT 기업 · IT-SYS-008 · 사내 일반</a:t>
             </a:r>
           </a:p>
         </p:txBody>
@@ -8109,7 +8109,7 @@
                 <a:ea typeface="Malgun Gothic"/>
                 <a:cs typeface="Malgun Gothic"/>
               </a:rPr>
-              <a:t>© HANWHA SYSTEMS ICT · IT-SYS-008 · 사내 일반</a:t>
+              <a:t>© 가상 ICT 기업 · IT-SYS-008 · 사내 일반</a:t>
             </a:r>
           </a:p>
         </p:txBody>
@@ -8856,7 +8856,7 @@
                 <a:ea typeface="Malgun Gothic"/>
                 <a:cs typeface="Malgun Gothic"/>
               </a:rPr>
-              <a:t>© HANWHA SYSTEMS ICT · IT-SYS-008 · 사내 일반</a:t>
+              <a:t>© 가상 ICT 기업 · IT-SYS-008 · 사내 일반</a:t>
             </a:r>
           </a:p>
         </p:txBody>
@@ -11330,7 +11330,7 @@
                 <a:ea typeface="Malgun Gothic"/>
                 <a:cs typeface="Malgun Gothic"/>
               </a:rPr>
-              <a:t>© HANWHA SYSTEMS ICT · IT-SYS-008 · 사내 일반</a:t>
+              <a:t>© 가상 ICT 기업 · IT-SYS-008 · 사내 일반</a:t>
             </a:r>
           </a:p>
         </p:txBody>
@@ -11940,7 +11940,7 @@
                 <a:ea typeface="Malgun Gothic"/>
                 <a:cs typeface="Malgun Gothic"/>
               </a:rPr>
-              <a:t>© HANWHA SYSTEMS ICT · IT-SYS-008 · 사내 일반</a:t>
+              <a:t>© 가상 ICT 기업 · IT-SYS-008 · 사내 일반</a:t>
             </a:r>
           </a:p>
         </p:txBody>
@@ -12503,7 +12503,7 @@
                 <a:ea typeface="Malgun Gothic"/>
                 <a:cs typeface="Malgun Gothic"/>
               </a:rPr>
-              <a:t>© HANWHA SYSTEMS ICT · IT-SYS-008 · 사내 일반</a:t>
+              <a:t>© 가상 ICT 기업 · IT-SYS-008 · 사내 일반</a:t>
             </a:r>
           </a:p>
         </p:txBody>
@@ -13279,7 +13279,7 @@
                 <a:ea typeface="Malgun Gothic"/>
                 <a:cs typeface="Malgun Gothic"/>
               </a:rPr>
-              <a:t>© HANWHA SYSTEMS ICT · IT-SYS-008 · 사내 일반</a:t>
+              <a:t>© 가상 ICT 기업 · IT-SYS-008 · 사내 일반</a:t>
             </a:r>
           </a:p>
         </p:txBody>
@@ -15683,7 +15683,7 @@
                 <a:ea typeface="Malgun Gothic"/>
                 <a:cs typeface="Malgun Gothic"/>
               </a:rPr>
-              <a:t>© HANWHA SYSTEMS ICT · IT-SYS-008 · 사내 일반</a:t>
+              <a:t>© 가상 ICT 기업 · IT-SYS-008 · 사내 일반</a:t>
             </a:r>
           </a:p>
         </p:txBody>
@@ -17488,7 +17488,7 @@
                 <a:ea typeface="Malgun Gothic"/>
                 <a:cs typeface="Malgun Gothic"/>
               </a:rPr>
-              <a:t>© HANWHA SYSTEMS ICT · IT-SYS-008 · 사내 일반</a:t>
+              <a:t>© 가상 ICT 기업 · IT-SYS-008 · 사내 일반</a:t>
             </a:r>
           </a:p>
         </p:txBody>
@@ -18098,7 +18098,7 @@
                 <a:ea typeface="Malgun Gothic"/>
                 <a:cs typeface="Malgun Gothic"/>
               </a:rPr>
-              <a:t>© HANWHA SYSTEMS ICT · IT-SYS-008 · 사내 일반</a:t>
+              <a:t>© 가상 ICT 기업 · IT-SYS-008 · 사내 일반</a:t>
             </a:r>
           </a:p>
         </p:txBody>
@@ -18874,7 +18874,7 @@
                 <a:ea typeface="Malgun Gothic"/>
                 <a:cs typeface="Malgun Gothic"/>
               </a:rPr>
-              <a:t>© HANWHA SYSTEMS ICT · IT-SYS-008 · 사내 일반</a:t>
+              <a:t>© 가상 ICT 기업 · IT-SYS-008 · 사내 일반</a:t>
             </a:r>
           </a:p>
         </p:txBody>
@@ -19122,7 +19122,7 @@
                 <a:ea typeface="Malgun Gothic"/>
                 <a:cs typeface="Malgun Gothic"/>
               </a:rPr>
-              <a:t>© HANWHA SYSTEMS ICT · IT-SYS-008 · 사내 일반</a:t>
+              <a:t>© 가상 ICT 기업 · IT-SYS-008 · 사내 일반</a:t>
             </a:r>
           </a:p>
         </p:txBody>
@@ -19903,7 +19903,7 @@
                 <a:ea typeface="Malgun Gothic"/>
                 <a:cs typeface="Malgun Gothic"/>
               </a:rPr>
-              <a:t>© HANWHA SYSTEMS ICT · IT-SYS-008 · 사내 일반</a:t>
+              <a:t>© 가상 ICT 기업 · IT-SYS-008 · 사내 일반</a:t>
             </a:r>
           </a:p>
         </p:txBody>
@@ -20151,7 +20151,7 @@
                 <a:ea typeface="Malgun Gothic"/>
                 <a:cs typeface="Malgun Gothic"/>
               </a:rPr>
-              <a:t>© HANWHA SYSTEMS ICT · IT-SYS-008 · 사내 일반</a:t>
+              <a:t>© 가상 ICT 기업 · IT-SYS-008 · 사내 일반</a:t>
             </a:r>
           </a:p>
         </p:txBody>
@@ -20810,7 +20810,7 @@
                 <a:ea typeface="Malgun Gothic"/>
                 <a:cs typeface="Malgun Gothic"/>
               </a:rPr>
-              <a:t>© HANWHA SYSTEMS ICT · IT-SYS-008 · 사내 일반</a:t>
+              <a:t>© 가상 ICT 기업 · IT-SYS-008 · 사내 일반</a:t>
             </a:r>
           </a:p>
         </p:txBody>
@@ -21058,7 +21058,7 @@
                 <a:ea typeface="Malgun Gothic"/>
                 <a:cs typeface="Malgun Gothic"/>
               </a:rPr>
-              <a:t>© HANWHA SYSTEMS ICT · IT-SYS-008 · 사내 일반</a:t>
+              <a:t>© 가상 ICT 기업 · IT-SYS-008 · 사내 일반</a:t>
             </a:r>
           </a:p>
         </p:txBody>
@@ -21570,7 +21570,7 @@
                           <a:ea typeface="Malgun Gothic"/>
                           <a:cs typeface="Malgun Gothic"/>
                         </a:rPr>
-                        <a:t>사내 IT 포털(hanwha-admin) 상단 [챗봇 문의]</a:t>
+                        <a:t>사내 IT 포털 상단 [챗봇 문의]</a:t>
                       </a:r>
                     </a:p>
                   </a:txBody>
@@ -22262,7 +22262,7 @@
                           <a:ea typeface="Malgun Gothic"/>
                           <a:cs typeface="Malgun Gothic"/>
                         </a:rPr>
-                        <a:t>it-helpdesk@hanwha-ict.example</a:t>
+                        <a:t>it-helpdesk@ict.example</a:t>
                       </a:r>
                     </a:p>
                   </a:txBody>
@@ -22561,7 +22561,7 @@
                 <a:ea typeface="Malgun Gothic"/>
                 <a:cs typeface="Malgun Gothic"/>
               </a:rPr>
-              <a:t>© HANWHA SYSTEMS ICT · IT-SYS-008 · 사내 일반</a:t>
+              <a:t>© 가상 ICT 기업 · IT-SYS-008 · 사내 일반</a:t>
             </a:r>
           </a:p>
         </p:txBody>
@@ -22809,7 +22809,7 @@
                 <a:ea typeface="Malgun Gothic"/>
                 <a:cs typeface="Malgun Gothic"/>
               </a:rPr>
-              <a:t>© HANWHA SYSTEMS ICT · IT-SYS-008 · 사내 일반</a:t>
+              <a:t>© 가상 ICT 기업 · IT-SYS-008 · 사내 일반</a:t>
             </a:r>
           </a:p>
         </p:txBody>
@@ -24634,7 +24634,7 @@
                 <a:ea typeface="Malgun Gothic"/>
                 <a:cs typeface="Malgun Gothic"/>
               </a:rPr>
-              <a:t>© HANWHA SYSTEMS ICT · IT-SYS-008 · 사내 일반</a:t>
+              <a:t>© 가상 ICT 기업 · IT-SYS-008 · 사내 일반</a:t>
             </a:r>
           </a:p>
         </p:txBody>
@@ -25910,7 +25910,7 @@
                 <a:ea typeface="Malgun Gothic"/>
                 <a:cs typeface="Malgun Gothic"/>
               </a:rPr>
-              <a:t>© HANWHA SYSTEMS ICT · IT-SYS-008 · 사내 일반</a:t>
+              <a:t>© 가상 ICT 기업 · IT-SYS-008 · 사내 일반</a:t>
             </a:r>
           </a:p>
         </p:txBody>
@@ -26887,7 +26887,7 @@
                 <a:ea typeface="Malgun Gothic"/>
                 <a:cs typeface="Malgun Gothic"/>
               </a:rPr>
-              <a:t>© HANWHA SYSTEMS ICT · IT-SYS-008 · 사내 일반</a:t>
+              <a:t>© 가상 ICT 기업 · IT-SYS-008 · 사내 일반</a:t>
             </a:r>
           </a:p>
         </p:txBody>
@@ -27135,7 +27135,7 @@
                 <a:ea typeface="Malgun Gothic"/>
                 <a:cs typeface="Malgun Gothic"/>
               </a:rPr>
-              <a:t>© HANWHA SYSTEMS ICT · IT-SYS-008 · 사내 일반</a:t>
+              <a:t>© 가상 ICT 기업 · IT-SYS-008 · 사내 일반</a:t>
             </a:r>
           </a:p>
         </p:txBody>
@@ -27903,7 +27903,7 @@
                 <a:ea typeface="Malgun Gothic"/>
                 <a:cs typeface="Malgun Gothic"/>
               </a:rPr>
-              <a:t>© HANWHA SYSTEMS ICT · IT-SYS-008 · 사내 일반</a:t>
+              <a:t>© 가상 ICT 기업 · IT-SYS-008 · 사내 일반</a:t>
             </a:r>
           </a:p>
         </p:txBody>
@@ -28151,7 +28151,7 @@
                 <a:ea typeface="Malgun Gothic"/>
                 <a:cs typeface="Malgun Gothic"/>
               </a:rPr>
-              <a:t>© HANWHA SYSTEMS ICT · IT-SYS-008 · 사내 일반</a:t>
+              <a:t>© 가상 ICT 기업 · IT-SYS-008 · 사내 일반</a:t>
             </a:r>
           </a:p>
         </p:txBody>
@@ -28810,7 +28810,7 @@
                 <a:ea typeface="Malgun Gothic"/>
                 <a:cs typeface="Malgun Gothic"/>
               </a:rPr>
-              <a:t>© HANWHA SYSTEMS ICT · IT-SYS-008 · 사내 일반</a:t>
+              <a:t>© 가상 ICT 기업 · IT-SYS-008 · 사내 일반</a:t>
             </a:r>
           </a:p>
         </p:txBody>
@@ -29058,7 +29058,7 @@
                 <a:ea typeface="Malgun Gothic"/>
                 <a:cs typeface="Malgun Gothic"/>
               </a:rPr>
-              <a:t>© HANWHA SYSTEMS ICT · IT-SYS-008 · 사내 일반</a:t>
+              <a:t>© 가상 ICT 기업 · IT-SYS-008 · 사내 일반</a:t>
             </a:r>
           </a:p>
         </p:txBody>
@@ -31018,7 +31018,7 @@
                 <a:ea typeface="Malgun Gothic"/>
                 <a:cs typeface="Malgun Gothic"/>
               </a:rPr>
-              <a:t>© HANWHA SYSTEMS ICT · IT-SYS-008 · 사내 일반</a:t>
+              <a:t>© 가상 ICT 기업 · IT-SYS-008 · 사내 일반</a:t>
             </a:r>
           </a:p>
         </p:txBody>
